--- a/W25-940c86/mon/slides/08-closing.pptx
+++ b/W25-940c86/mon/slides/08-closing.pptx
@@ -3096,119 +3096,22 @@
         <p:nvPr/>
       </p:nvGrpSpPr>
       <p:grpSpPr/>
-      <p:pic>
-        <p:nvPicPr>
-          <p:cNvPr id="2" name="Picture 1" descr="soul_b5418a105af8b36e.png"/>
-          <p:cNvPicPr>
-            <a:picLocks noChangeAspect="1"/>
-          </p:cNvPicPr>
+      <p:sp>
+        <p:nvSpPr>
+          <p:cNvPr id="2" name="Rectangle 1"/>
+          <p:cNvSpPr/>
           <p:nvPr/>
-        </p:nvPicPr>
-        <p:blipFill>
-          <a:blip r:embed="rId2"/>
-          <a:stretch>
-            <a:fillRect/>
-          </a:stretch>
-        </p:blipFill>
+        </p:nvSpPr>
         <p:spPr>
           <a:xfrm>
-            <a:off x="0" y="0"/>
-            <a:ext cx="10287000" cy="12858750"/>
-          </a:xfrm>
-          <a:prstGeom prst="rect">
-            <a:avLst/>
-          </a:prstGeom>
-        </p:spPr>
-      </p:pic>
-      <p:sp>
-        <p:nvSpPr>
-          <p:cNvPr id="3" name="TextBox 2"/>
-          <p:cNvSpPr txBox="1"/>
-          <p:nvPr/>
-        </p:nvSpPr>
-        <p:spPr>
-          <a:xfrm>
-            <a:off x="609600" y="762000"/>
-            <a:ext cx="8572500" cy="285750"/>
-          </a:xfrm>
-          <a:prstGeom prst="rect">
-            <a:avLst/>
-          </a:prstGeom>
-          <a:noFill/>
-        </p:spPr>
-        <p:txBody>
-          <a:bodyPr wrap="square" lIns="0" rIns="0" tIns="0" bIns="0">
-            <a:spAutoFit/>
-          </a:bodyPr>
-          <a:lstStyle/>
-          <a:p>
-            <a:r>
-              <a:rPr sz="1000" b="1" i="0">
-                <a:solidFill>
-                  <a:srgbClr val="F5F1EC"/>
-                </a:solidFill>
-                <a:latin typeface="PT Serif"/>
-              </a:rPr>
-              <a:t>RATES — JUNE 2026</a:t>
-            </a:r>
-          </a:p>
-        </p:txBody>
-      </p:sp>
-      <p:sp>
-        <p:nvSpPr>
-          <p:cNvPr id="4" name="TextBox 3"/>
-          <p:cNvSpPr txBox="1"/>
-          <p:nvPr/>
-        </p:nvSpPr>
-        <p:spPr>
-          <a:xfrm>
-            <a:off x="609600" y="7810500"/>
-            <a:ext cx="9067800" cy="1524000"/>
-          </a:xfrm>
-          <a:prstGeom prst="rect">
-            <a:avLst/>
-          </a:prstGeom>
-          <a:noFill/>
-        </p:spPr>
-        <p:txBody>
-          <a:bodyPr wrap="square" lIns="0" rIns="0" tIns="0" bIns="0">
-            <a:spAutoFit/>
-          </a:bodyPr>
-          <a:lstStyle/>
-          <a:p>
-            <a:pPr>
-              <a:lnSpc>
-                <a:spcPct val="112000"/>
-              </a:lnSpc>
-            </a:pPr>
-            <a:r>
-              <a:rPr sz="4000" b="1" i="1">
-                <a:solidFill>
-                  <a:srgbClr val="F5F1EC"/>
-                </a:solidFill>
-                <a:latin typeface="Playfair Display"/>
-              </a:rPr>
-              <a:t>Does this change when you want to be in the market?</a:t>
-            </a:r>
-          </a:p>
-        </p:txBody>
-      </p:sp>
-      <p:sp>
-        <p:nvSpPr>
-          <p:cNvPr id="5" name="Rectangle 4"/>
-          <p:cNvSpPr/>
-          <p:nvPr/>
-        </p:nvSpPr>
-        <p:spPr>
-          <a:xfrm>
-            <a:off x="609600" y="9525000"/>
-            <a:ext cx="1143000" cy="19050"/>
+            <a:off x="0" y="5905500"/>
+            <a:ext cx="10287000" cy="6953250"/>
           </a:xfrm>
           <a:prstGeom prst="rect">
             <a:avLst/>
           </a:prstGeom>
           <a:solidFill>
-            <a:srgbClr val="C99A6C"/>
+            <a:srgbClr val="100B07"/>
           </a:solidFill>
           <a:ln>
             <a:noFill/>
@@ -3238,14 +3141,14 @@
       </p:sp>
       <p:sp>
         <p:nvSpPr>
-          <p:cNvPr id="6" name="TextBox 5"/>
+          <p:cNvPr id="3" name="TextBox 2"/>
           <p:cNvSpPr txBox="1"/>
           <p:nvPr/>
         </p:nvSpPr>
         <p:spPr>
           <a:xfrm>
-            <a:off x="609600" y="10001250"/>
-            <a:ext cx="9067800" cy="762000"/>
+            <a:off x="762000" y="8191500"/>
+            <a:ext cx="8763000" cy="1524000"/>
           </a:xfrm>
           <a:prstGeom prst="rect">
             <a:avLst/>
@@ -3260,15 +3163,15 @@
           <a:p>
             <a:pPr>
               <a:lnSpc>
-                <a:spcPct val="150000"/>
+                <a:spcPct val="135000"/>
               </a:lnSpc>
             </a:pPr>
             <a:r>
-              <a:rPr sz="1600" b="0" i="0">
+              <a:rPr sz="2200" b="0" i="1">
                 <a:solidFill>
                   <a:srgbClr val="F5F1EC"/>
                 </a:solidFill>
-                <a:latin typeface="PT Serif"/>
+                <a:latin typeface="Playfair Display"/>
               </a:rPr>
               <a:t>Rates as of June 12, 2026: Freddie Mac PMMS 6.52%. Inflation: Bankrate/BLS (May 2026 CPI).</a:t>
             </a:r>
@@ -3277,14 +3180,14 @@
       </p:sp>
       <p:sp>
         <p:nvSpPr>
-          <p:cNvPr id="7" name="TextBox 6"/>
+          <p:cNvPr id="4" name="TextBox 3"/>
           <p:cNvSpPr txBox="1"/>
           <p:nvPr/>
         </p:nvSpPr>
         <p:spPr>
           <a:xfrm>
-            <a:off x="609600" y="11430000"/>
-            <a:ext cx="3810000" cy="476250"/>
+            <a:off x="762000" y="9906000"/>
+            <a:ext cx="8763000" cy="1143000"/>
           </a:xfrm>
           <a:prstGeom prst="rect">
             <a:avLst/>
@@ -3298,13 +3201,125 @@
           <a:lstStyle/>
           <a:p>
             <a:r>
-              <a:rPr sz="3600" b="0" i="0">
+              <a:rPr sz="4400" b="0" i="0">
                 <a:solidFill>
-                  <a:srgbClr val="C99A6C"/>
+                  <a:srgbClr val="F2E0C4"/>
                 </a:solidFill>
                 <a:latin typeface="Pinyon Script"/>
               </a:rPr>
               <a:t>— Laurène</a:t>
+            </a:r>
+          </a:p>
+        </p:txBody>
+      </p:sp>
+      <p:sp>
+        <p:nvSpPr>
+          <p:cNvPr id="5" name="Rectangle 4"/>
+          <p:cNvSpPr/>
+          <p:nvPr/>
+        </p:nvSpPr>
+        <p:spPr>
+          <a:xfrm>
+            <a:off x="762000" y="11715750"/>
+            <a:ext cx="8763000" cy="9525"/>
+          </a:xfrm>
+          <a:prstGeom prst="rect">
+            <a:avLst/>
+          </a:prstGeom>
+          <a:solidFill>
+            <a:srgbClr val="6F6860"/>
+          </a:solidFill>
+          <a:ln>
+            <a:noFill/>
+          </a:ln>
+        </p:spPr>
+        <p:style>
+          <a:lnRef idx="1">
+            <a:schemeClr val="accent1"/>
+          </a:lnRef>
+          <a:fillRef idx="3">
+            <a:schemeClr val="accent1"/>
+          </a:fillRef>
+          <a:effectRef idx="2">
+            <a:schemeClr val="accent1"/>
+          </a:effectRef>
+          <a:fontRef idx="minor">
+            <a:schemeClr val="lt1"/>
+          </a:fontRef>
+        </p:style>
+        <p:txBody>
+          <a:bodyPr rtlCol="0" anchor="ctr"/>
+          <a:lstStyle/>
+          <a:p>
+            <a:pPr algn="ctr"/>
+          </a:p>
+        </p:txBody>
+      </p:sp>
+      <p:sp>
+        <p:nvSpPr>
+          <p:cNvPr id="6" name="TextBox 5"/>
+          <p:cNvSpPr txBox="1"/>
+          <p:nvPr/>
+        </p:nvSpPr>
+        <p:spPr>
+          <a:xfrm>
+            <a:off x="762000" y="12001500"/>
+            <a:ext cx="4381500" cy="228600"/>
+          </a:xfrm>
+          <a:prstGeom prst="rect">
+            <a:avLst/>
+          </a:prstGeom>
+          <a:noFill/>
+        </p:spPr>
+        <p:txBody>
+          <a:bodyPr wrap="square" lIns="0" rIns="0" tIns="0" bIns="0">
+            <a:spAutoFit/>
+          </a:bodyPr>
+          <a:lstStyle/>
+          <a:p>
+            <a:r>
+              <a:rPr sz="800" b="1" i="0">
+                <a:solidFill>
+                  <a:srgbClr val="F5F1EC"/>
+                </a:solidFill>
+                <a:latin typeface="PT Serif"/>
+              </a:rPr>
+              <a:t>LAURÈNE CHÂTELAIN</a:t>
+            </a:r>
+          </a:p>
+        </p:txBody>
+      </p:sp>
+      <p:sp>
+        <p:nvSpPr>
+          <p:cNvPr id="7" name="TextBox 6"/>
+          <p:cNvSpPr txBox="1"/>
+          <p:nvPr/>
+        </p:nvSpPr>
+        <p:spPr>
+          <a:xfrm>
+            <a:off x="5143500" y="12001500"/>
+            <a:ext cx="4381500" cy="228600"/>
+          </a:xfrm>
+          <a:prstGeom prst="rect">
+            <a:avLst/>
+          </a:prstGeom>
+          <a:noFill/>
+        </p:spPr>
+        <p:txBody>
+          <a:bodyPr wrap="square" lIns="0" rIns="0" tIns="0" bIns="0">
+            <a:spAutoFit/>
+          </a:bodyPr>
+          <a:lstStyle/>
+          <a:p>
+            <a:pPr algn="r"/>
+            <a:r>
+              <a:rPr sz="800" b="1" i="0">
+                <a:solidFill>
+                  <a:srgbClr val="C9C0B9"/>
+                </a:solidFill>
+                <a:latin typeface="PT Serif"/>
+              </a:rPr>
+              <a:t>THE MPH TEAM · COMPASS</a:t>
             </a:r>
           </a:p>
         </p:txBody>
